--- a/종합설계기획 발표 자료/SpaceRobber_ 임수영_임채은_윤이하나.pptx
+++ b/종합설계기획 발표 자료/SpaceRobber_ 임수영_임채은_윤이하나.pptx
@@ -1167,7 +1167,7 @@
         </p:nvSpPr>
         <p:spPr>
           <a:xfrm>
-            <a:off x="381300" y="685800"/>
+            <a:off x="381000" y="685800"/>
             <a:ext cx="6096000" cy="3429000"/>
           </a:xfrm>
           <a:custGeom>
@@ -1687,7 +1687,7 @@
         </p:nvSpPr>
         <p:spPr>
           <a:xfrm>
-            <a:off x="381300" y="685800"/>
+            <a:off x="381000" y="685800"/>
             <a:ext cx="6096000" cy="3429000"/>
           </a:xfrm>
           <a:custGeom>
@@ -1791,7 +1791,7 @@
         </p:nvSpPr>
         <p:spPr>
           <a:xfrm>
-            <a:off x="381300" y="685800"/>
+            <a:off x="381000" y="685800"/>
             <a:ext cx="6096000" cy="3429000"/>
           </a:xfrm>
           <a:custGeom>
@@ -1895,7 +1895,7 @@
         </p:nvSpPr>
         <p:spPr>
           <a:xfrm>
-            <a:off x="381300" y="685800"/>
+            <a:off x="381000" y="685800"/>
             <a:ext cx="6096000" cy="3429000"/>
           </a:xfrm>
           <a:custGeom>
@@ -8474,11 +8474,17 @@
         <p:nvGraphicFramePr>
           <p:cNvPr id="179" name="Google Shape;179;p25"/>
           <p:cNvGraphicFramePr/>
-          <p:nvPr/>
+          <p:nvPr>
+            <p:extLst>
+              <p:ext uri="{D42A27DB-BD31-4B8C-83A1-F6EECF244321}">
+                <p14:modId xmlns:p14="http://schemas.microsoft.com/office/powerpoint/2010/main" val="1846009231"/>
+              </p:ext>
+            </p:extLst>
+          </p:nvPr>
         </p:nvGraphicFramePr>
         <p:xfrm>
           <a:off x="826438" y="1510225"/>
-          <a:ext cx="3000000" cy="3000000"/>
+          <a:ext cx="7491125" cy="3177175"/>
         </p:xfrm>
         <a:graphic>
           <a:graphicData uri="http://schemas.openxmlformats.org/drawingml/2006/table">
@@ -8785,15 +8791,15 @@
                         <a:buNone/>
                       </a:pPr>
                       <a:r>
-                        <a:rPr lang="ko" sz="1800">
+                        <a:rPr lang="ko" sz="1800" dirty="0">
                           <a:latin typeface="Jua"/>
                           <a:ea typeface="Jua"/>
                           <a:cs typeface="Jua"/>
                           <a:sym typeface="Jua"/>
                         </a:rPr>
-                        <a:t>OpenCV 라이브러리를 사용하여 사용자 반응에 기반 컨텐츠 생성</a:t>
+                        <a:t>OpenCV 라이브러리를 사용하여 사용자 반응 기반 컨텐츠 생성</a:t>
                       </a:r>
-                      <a:endParaRPr sz="1800">
+                      <a:endParaRPr sz="1800" dirty="0">
                         <a:latin typeface="Jua"/>
                         <a:ea typeface="Jua"/>
                         <a:cs typeface="Jua"/>
@@ -8811,7 +8817,7 @@
                         <a:buNone/>
                       </a:pPr>
                       <a:r>
-                        <a:rPr lang="ko" sz="1800">
+                        <a:rPr lang="ko" sz="1800" dirty="0">
                           <a:latin typeface="Jua"/>
                           <a:ea typeface="Jua"/>
                           <a:cs typeface="Jua"/>
@@ -8819,7 +8825,7 @@
                         </a:rPr>
                         <a:t>멀티 쓰레드를 사용한 성능 최적화 </a:t>
                       </a:r>
-                      <a:endParaRPr sz="1800">
+                      <a:endParaRPr sz="1800" dirty="0">
                         <a:latin typeface="Jua"/>
                         <a:ea typeface="Jua"/>
                         <a:cs typeface="Jua"/>
@@ -8897,7 +8903,7 @@
                         <a:buNone/>
                       </a:pPr>
                       <a:r>
-                        <a:rPr lang="ko" sz="1800">
+                        <a:rPr lang="ko" sz="1800" dirty="0">
                           <a:latin typeface="Jua"/>
                           <a:ea typeface="Jua"/>
                           <a:cs typeface="Jua"/>
@@ -8906,7 +8912,7 @@
                         <a:t>절차적 생성을 위한 맵 모듈(방) 설계 및 생성 규칙 기획</a:t>
                       </a:r>
                       <a:br>
-                        <a:rPr lang="ko" sz="1800">
+                        <a:rPr lang="ko" sz="1800" dirty="0">
                           <a:latin typeface="Jua"/>
                           <a:ea typeface="Jua"/>
                           <a:cs typeface="Jua"/>
@@ -8914,7 +8920,7 @@
                         </a:rPr>
                       </a:br>
                       <a:r>
-                        <a:rPr lang="ko" sz="1800">
+                        <a:rPr lang="ko" sz="1800" dirty="0">
                           <a:latin typeface="Jua"/>
                           <a:ea typeface="Jua"/>
                           <a:cs typeface="Jua"/>
@@ -8922,7 +8928,7 @@
                         </a:rPr>
                         <a:t>OpenCV 데이터 기반의 게임 난이도 조절 시스템 기획</a:t>
                       </a:r>
-                      <a:endParaRPr sz="1800">
+                      <a:endParaRPr sz="1800" dirty="0">
                         <a:latin typeface="Jua"/>
                         <a:ea typeface="Jua"/>
                         <a:cs typeface="Jua"/>
@@ -10717,11 +10723,17 @@
         <p:nvGraphicFramePr>
           <p:cNvPr id="70" name="Google Shape;70;p15"/>
           <p:cNvGraphicFramePr/>
-          <p:nvPr/>
+          <p:nvPr>
+            <p:extLst>
+              <p:ext uri="{D42A27DB-BD31-4B8C-83A1-F6EECF244321}">
+                <p14:modId xmlns:p14="http://schemas.microsoft.com/office/powerpoint/2010/main" val="2414246648"/>
+              </p:ext>
+            </p:extLst>
+          </p:nvPr>
         </p:nvGraphicFramePr>
         <p:xfrm>
           <a:off x="693675" y="1389475"/>
-          <a:ext cx="3000000" cy="3000000"/>
+          <a:ext cx="7756625" cy="3322200"/>
         </p:xfrm>
         <a:graphic>
           <a:graphicData uri="http://schemas.openxmlformats.org/drawingml/2006/table">
@@ -10953,7 +10965,7 @@
                         <a:buNone/>
                       </a:pPr>
                       <a:r>
-                        <a:rPr lang="ko" sz="1700">
+                        <a:rPr lang="ko" sz="1700" dirty="0">
                           <a:latin typeface="Jua"/>
                           <a:ea typeface="Jua"/>
                           <a:cs typeface="Jua"/>
@@ -10962,7 +10974,7 @@
                         <a:t>C 프로그래밍, </a:t>
                       </a:r>
                       <a:r>
-                        <a:rPr lang="ko" sz="1700">
+                        <a:rPr lang="ko" sz="1700" dirty="0">
                           <a:highlight>
                             <a:srgbClr val="F4CCCC"/>
                           </a:highlight>
@@ -10974,7 +10986,7 @@
                         <a:t>STL</a:t>
                       </a:r>
                       <a:r>
-                        <a:rPr lang="ko" sz="1700">
+                        <a:rPr lang="ko" sz="1700" dirty="0">
                           <a:latin typeface="Jua"/>
                           <a:ea typeface="Jua"/>
                           <a:cs typeface="Jua"/>
@@ -10983,7 +10995,7 @@
                         <a:t>, 컴퓨터 그래픽스, 게임수학, 3D게임프로그래밍1, 3D게임프로그래밍2, </a:t>
                       </a:r>
                       <a:r>
-                        <a:rPr lang="ko" sz="1700">
+                        <a:rPr lang="ko" sz="1700" dirty="0">
                           <a:highlight>
                             <a:srgbClr val="F4CCCC"/>
                           </a:highlight>
@@ -10995,7 +11007,7 @@
                         <a:t>인공지능</a:t>
                       </a:r>
                       <a:r>
-                        <a:rPr lang="ko" sz="1700">
+                        <a:rPr lang="ko" sz="1700" dirty="0">
                           <a:latin typeface="Jua"/>
                           <a:ea typeface="Jua"/>
                           <a:cs typeface="Jua"/>
@@ -11004,7 +11016,7 @@
                         <a:t>, </a:t>
                       </a:r>
                       <a:r>
-                        <a:rPr lang="ko" sz="1700">
+                        <a:rPr lang="ko" sz="1700" dirty="0">
                           <a:highlight>
                             <a:srgbClr val="F4CCCC"/>
                           </a:highlight>
@@ -11016,7 +11028,7 @@
                         <a:t>네트워크 게임 프로그래밍</a:t>
                       </a:r>
                       <a:r>
-                        <a:rPr lang="ko" sz="1700">
+                        <a:rPr lang="ko" sz="1700" dirty="0">
                           <a:latin typeface="Jua"/>
                           <a:ea typeface="Jua"/>
                           <a:cs typeface="Jua"/>
@@ -11025,7 +11037,7 @@
                         <a:t>, </a:t>
                       </a:r>
                       <a:r>
-                        <a:rPr lang="ko" sz="1700">
+                        <a:rPr lang="ko" sz="1700" dirty="0">
                           <a:highlight>
                             <a:srgbClr val="F4CCCC"/>
                           </a:highlight>
@@ -11036,7 +11048,7 @@
                         </a:rPr>
                         <a:t>데이터베이스</a:t>
                       </a:r>
-                      <a:endParaRPr sz="1700">
+                      <a:endParaRPr sz="1700" dirty="0">
                         <a:highlight>
                           <a:srgbClr val="F4CCCC"/>
                         </a:highlight>
@@ -11137,7 +11149,7 @@
                         <a:buNone/>
                       </a:pPr>
                       <a:r>
-                        <a:rPr lang="ko" sz="1700">
+                        <a:rPr lang="ko" sz="1700" dirty="0">
                           <a:latin typeface="Jua"/>
                           <a:ea typeface="Jua"/>
                           <a:cs typeface="Jua"/>
@@ -11146,7 +11158,7 @@
                         <a:t>C, </a:t>
                       </a:r>
                       <a:r>
-                        <a:rPr lang="ko" sz="1700">
+                        <a:rPr lang="ko" sz="1700" dirty="0">
                           <a:highlight>
                             <a:srgbClr val="F4CCCC"/>
                           </a:highlight>
@@ -11158,7 +11170,7 @@
                         <a:t>C++ 프로그래밍</a:t>
                       </a:r>
                       <a:r>
-                        <a:rPr lang="ko" sz="1700">
+                        <a:rPr lang="ko" sz="1700" dirty="0">
                           <a:latin typeface="Jua"/>
                           <a:ea typeface="Jua"/>
                           <a:cs typeface="Jua"/>
@@ -11167,7 +11179,7 @@
                         <a:t>, </a:t>
                       </a:r>
                       <a:r>
-                        <a:rPr lang="ko" sz="1700">
+                        <a:rPr lang="ko" sz="1700" dirty="0">
                           <a:highlight>
                             <a:srgbClr val="F4CCCC"/>
                           </a:highlight>
@@ -11179,7 +11191,7 @@
                         <a:t>STL</a:t>
                       </a:r>
                       <a:r>
-                        <a:rPr lang="ko" sz="1700">
+                        <a:rPr lang="ko" sz="1700" dirty="0">
                           <a:latin typeface="Jua"/>
                           <a:ea typeface="Jua"/>
                           <a:cs typeface="Jua"/>
@@ -11188,7 +11200,7 @@
                         <a:t>, </a:t>
                       </a:r>
                       <a:r>
-                        <a:rPr lang="ko" sz="1700">
+                        <a:rPr lang="ko" sz="1700" dirty="0">
                           <a:highlight>
                             <a:srgbClr val="F4CCCC"/>
                           </a:highlight>
@@ -11200,7 +11212,7 @@
                         <a:t>컴퓨터 그래픽스</a:t>
                       </a:r>
                       <a:r>
-                        <a:rPr lang="ko" sz="1700">
+                        <a:rPr lang="ko" sz="1700" dirty="0">
                           <a:latin typeface="Jua"/>
                           <a:ea typeface="Jua"/>
                           <a:cs typeface="Jua"/>
@@ -11209,7 +11221,7 @@
                         <a:t>, </a:t>
                       </a:r>
                       <a:r>
-                        <a:rPr lang="ko" sz="1700">
+                        <a:rPr lang="ko" sz="1700" dirty="0">
                           <a:highlight>
                             <a:srgbClr val="F4CCCC"/>
                           </a:highlight>
@@ -11221,7 +11233,7 @@
                         <a:t>게임수학</a:t>
                       </a:r>
                       <a:r>
-                        <a:rPr lang="ko" sz="1700">
+                        <a:rPr lang="ko" sz="1700" dirty="0">
                           <a:latin typeface="Jua"/>
                           <a:ea typeface="Jua"/>
                           <a:cs typeface="Jua"/>
@@ -11229,7 +11241,7 @@
                         </a:rPr>
                         <a:t>, 3D게임프로그래밍1, 인공지능, 네트워크 게임 프로그래밍</a:t>
                       </a:r>
-                      <a:endParaRPr sz="1700">
+                      <a:endParaRPr sz="1700" dirty="0">
                         <a:latin typeface="Jua"/>
                         <a:ea typeface="Jua"/>
                         <a:cs typeface="Jua"/>
@@ -11327,7 +11339,7 @@
                         <a:buNone/>
                       </a:pPr>
                       <a:r>
-                        <a:rPr lang="ko" sz="1700">
+                        <a:rPr lang="ko" sz="1700" dirty="0">
                           <a:highlight>
                             <a:srgbClr val="F4CCCC"/>
                           </a:highlight>
@@ -11339,7 +11351,7 @@
                         <a:t>기획포트폴리오작성</a:t>
                       </a:r>
                       <a:r>
-                        <a:rPr lang="ko" sz="1700">
+                        <a:rPr lang="ko" sz="1700" dirty="0">
                           <a:solidFill>
                             <a:schemeClr val="dk1"/>
                           </a:solidFill>
@@ -11351,7 +11363,7 @@
                         <a:t>, </a:t>
                       </a:r>
                       <a:r>
-                        <a:rPr lang="ko" sz="1700">
+                        <a:rPr lang="ko" sz="1700" dirty="0">
                           <a:highlight>
                             <a:srgbClr val="F4CCCC"/>
                           </a:highlight>
@@ -11363,7 +11375,7 @@
                         <a:t>게임기획1</a:t>
                       </a:r>
                       <a:r>
-                        <a:rPr lang="ko" sz="1700">
+                        <a:rPr lang="ko" sz="1700" dirty="0">
                           <a:solidFill>
                             <a:schemeClr val="dk1"/>
                           </a:solidFill>
@@ -11375,7 +11387,7 @@
                         <a:t>, </a:t>
                       </a:r>
                       <a:r>
-                        <a:rPr lang="ko" sz="1700">
+                        <a:rPr lang="ko" sz="1700" dirty="0">
                           <a:highlight>
                             <a:srgbClr val="F4CCCC"/>
                           </a:highlight>
@@ -11387,7 +11399,7 @@
                         <a:t>게임기획2</a:t>
                       </a:r>
                       <a:r>
-                        <a:rPr lang="ko" sz="1700">
+                        <a:rPr lang="ko" sz="1700" dirty="0">
                           <a:solidFill>
                             <a:schemeClr val="dk1"/>
                           </a:solidFill>
@@ -11399,7 +11411,7 @@
                         <a:t>, 3D모델링1, 3D모델링2,</a:t>
                       </a:r>
                       <a:r>
-                        <a:rPr lang="ko" sz="1700">
+                        <a:rPr lang="ko" sz="1700" dirty="0">
                           <a:latin typeface="Jua"/>
                           <a:ea typeface="Jua"/>
                           <a:cs typeface="Jua"/>
@@ -11408,7 +11420,7 @@
                         <a:t> 3D애니메이션1, 3D애니메이션2, </a:t>
                       </a:r>
                       <a:r>
-                        <a:rPr lang="ko" sz="1700">
+                        <a:rPr lang="ko" sz="1700" dirty="0">
                           <a:solidFill>
                             <a:schemeClr val="dk1"/>
                           </a:solidFill>
@@ -11419,7 +11431,7 @@
                         </a:rPr>
                         <a:t>인공지능, 데이터베이스</a:t>
                       </a:r>
-                      <a:endParaRPr sz="1700">
+                      <a:endParaRPr sz="1700" dirty="0">
                         <a:latin typeface="Jua"/>
                         <a:ea typeface="Jua"/>
                         <a:cs typeface="Jua"/>
@@ -11618,7 +11630,7 @@
         </p:nvGraphicFramePr>
         <p:xfrm>
           <a:off x="1361550" y="1226913"/>
-          <a:ext cx="3000000" cy="3000000"/>
+          <a:ext cx="6420900" cy="3699535"/>
         </p:xfrm>
         <a:graphic>
           <a:graphicData uri="http://schemas.openxmlformats.org/drawingml/2006/table">
@@ -12343,7 +12355,7 @@
         </p:nvGraphicFramePr>
         <p:xfrm>
           <a:off x="952500" y="1840275"/>
-          <a:ext cx="3000000" cy="3000000"/>
+          <a:ext cx="7239000" cy="1462950"/>
         </p:xfrm>
         <a:graphic>
           <a:graphicData uri="http://schemas.openxmlformats.org/drawingml/2006/table">
